--- a/backend-stack-c/1_EA-and-backfill-worker-on-contabo-vps/MT5_to_LightweightCharts_Workflow.pptx
+++ b/backend-stack-c/1_EA-and-backfill-worker-on-contabo-vps/MT5_to_LightweightCharts_Workflow.pptx
@@ -2271,11 +2271,11 @@
         <p:spPr>
           <a:xfrm>
             <a:off x="685800" y="4160520"/>
-            <a:ext cx="3383280" cy="566928"/>
+            <a:ext cx="3383280" cy="868680"/>
           </a:xfrm>
           <a:prstGeom prst="roundRect">
             <a:avLst>
-              <a:gd name="adj" fmla="val 8065"/>
+              <a:gd name="adj" fmla="val 5263"/>
             </a:avLst>
           </a:prstGeom>
           <a:solidFill>
@@ -2297,7 +2297,46 @@
         </p:nvSpPr>
         <p:spPr>
           <a:xfrm>
-            <a:off x="822960" y="4215384"/>
+            <a:off x="822960" y="4233672"/>
+            <a:ext cx="3108960" cy="274320"/>
+          </a:xfrm>
+          <a:prstGeom prst="rect">
+            <a:avLst/>
+          </a:prstGeom>
+          <a:noFill/>
+          <a:ln/>
+        </p:spPr>
+        <p:txBody>
+          <a:bodyPr wrap="square" lIns="0" tIns="0" rIns="0" bIns="0" rtlCol="0" anchor="t"/>
+          <a:lstStyle/>
+          <a:p>
+            <a:pPr indent="0" marL="0">
+              <a:buNone/>
+            </a:pPr>
+            <a:r>
+              <a:rPr lang="en-US" sz="830" b="1" i="1" dirty="0">
+                <a:solidFill>
+                  <a:srgbClr val="6B7390"/>
+                </a:solidFill>
+                <a:latin typeface="Calibri" pitchFamily="34" charset="0"/>
+                <a:ea typeface="Calibri" pitchFamily="34" charset="-122"/>
+                <a:cs typeface="Calibri" pitchFamily="34" charset="-120"/>
+              </a:rPr>
+              <a:t>Also: Push Worker → Railway Gateway (NestJS)</a:t>
+            </a:r>
+            <a:endParaRPr lang="en-US" sz="830" dirty="0"/>
+          </a:p>
+        </p:txBody>
+      </p:sp>
+      <p:sp>
+        <p:nvSpPr>
+          <p:cNvPr id="20" name="Text 18"/>
+          <p:cNvSpPr/>
+          <p:nvPr/>
+        </p:nvSpPr>
+        <p:spPr>
+          <a:xfrm>
+            <a:off x="822960" y="4507992"/>
             <a:ext cx="3108960" cy="457200"/>
           </a:xfrm>
           <a:prstGeom prst="rect">
@@ -2325,7 +2364,7 @@
                 <a:ea typeface="Calibri" pitchFamily="34" charset="-122"/>
                 <a:cs typeface="Calibri" pitchFamily="34" charset="-120"/>
               </a:rPr>
-              <a:t>Also: Push Worker → Railway Gateway (NestJS)</a:t>
+              <a:t>Durable, validated copy for other backend consumers (alerts, analytics) — idempotent HTTP upserts, unrelated to this chart</a:t>
             </a:r>
             <a:endParaRPr lang="en-US" sz="780" dirty="0"/>
           </a:p>
@@ -2333,45 +2372,6 @@
       </p:sp>
       <p:sp>
         <p:nvSpPr>
-          <p:cNvPr id="20" name="Text 18"/>
-          <p:cNvSpPr/>
-          <p:nvPr/>
-        </p:nvSpPr>
-        <p:spPr>
-          <a:xfrm>
-            <a:off x="822960" y="4434840"/>
-            <a:ext cx="3108960" cy="274320"/>
-          </a:xfrm>
-          <a:prstGeom prst="rect">
-            <a:avLst/>
-          </a:prstGeom>
-          <a:noFill/>
-          <a:ln/>
-        </p:spPr>
-        <p:txBody>
-          <a:bodyPr wrap="square" lIns="0" tIns="0" rIns="0" bIns="0" rtlCol="0" anchor="t"/>
-          <a:lstStyle/>
-          <a:p>
-            <a:pPr indent="0" marL="0">
-              <a:buNone/>
-            </a:pPr>
-            <a:r>
-              <a:rPr lang="en-US" sz="780" i="1" dirty="0">
-                <a:solidFill>
-                  <a:srgbClr val="6B7390"/>
-                </a:solidFill>
-                <a:latin typeface="Calibri" pitchFamily="34" charset="0"/>
-                <a:ea typeface="Calibri" pitchFamily="34" charset="-122"/>
-                <a:cs typeface="Calibri" pitchFamily="34" charset="-120"/>
-              </a:rPr>
-              <a:t>separate consumers, unrelated to this chart</a:t>
-            </a:r>
-            <a:endParaRPr lang="en-US" sz="780" dirty="0"/>
-          </a:p>
-        </p:txBody>
-      </p:sp>
-      <p:sp>
-        <p:nvSpPr>
           <p:cNvPr id="21" name="Shape 19"/>
           <p:cNvSpPr/>
           <p:nvPr/>
@@ -2379,11 +2379,11 @@
         <p:spPr>
           <a:xfrm>
             <a:off x="4389120" y="4160520"/>
-            <a:ext cx="3383280" cy="566928"/>
+            <a:ext cx="3383280" cy="868680"/>
           </a:xfrm>
           <a:prstGeom prst="roundRect">
             <a:avLst>
-              <a:gd name="adj" fmla="val 8065"/>
+              <a:gd name="adj" fmla="val 5263"/>
             </a:avLst>
           </a:prstGeom>
           <a:solidFill>
@@ -2405,7 +2405,46 @@
         </p:nvSpPr>
         <p:spPr>
           <a:xfrm>
-            <a:off x="4526280" y="4215384"/>
+            <a:off x="4526280" y="4233672"/>
+            <a:ext cx="3108960" cy="274320"/>
+          </a:xfrm>
+          <a:prstGeom prst="rect">
+            <a:avLst/>
+          </a:prstGeom>
+          <a:noFill/>
+          <a:ln/>
+        </p:spPr>
+        <p:txBody>
+          <a:bodyPr wrap="square" lIns="0" tIns="0" rIns="0" bIns="0" rtlCol="0" anchor="t"/>
+          <a:lstStyle/>
+          <a:p>
+            <a:pPr indent="0" marL="0">
+              <a:buNone/>
+            </a:pPr>
+            <a:r>
+              <a:rPr lang="en-US" sz="830" b="1" i="1" dirty="0">
+                <a:solidFill>
+                  <a:srgbClr val="6B7390"/>
+                </a:solidFill>
+                <a:latin typeface="Calibri" pitchFamily="34" charset="0"/>
+                <a:ea typeface="Calibri" pitchFamily="34" charset="-122"/>
+                <a:cs typeface="Calibri" pitchFamily="34" charset="-120"/>
+              </a:rPr>
+              <a:t>Also: mtf_render → static 3-panel PNG</a:t>
+            </a:r>
+            <a:endParaRPr lang="en-US" sz="830" dirty="0"/>
+          </a:p>
+        </p:txBody>
+      </p:sp>
+      <p:sp>
+        <p:nvSpPr>
+          <p:cNvPr id="23" name="Text 21"/>
+          <p:cNvSpPr/>
+          <p:nvPr/>
+        </p:nvSpPr>
+        <p:spPr>
+          <a:xfrm>
+            <a:off x="4526280" y="4507992"/>
             <a:ext cx="3108960" cy="457200"/>
           </a:xfrm>
           <a:prstGeom prst="rect">
@@ -2433,46 +2472,7 @@
                 <a:ea typeface="Calibri" pitchFamily="34" charset="-122"/>
                 <a:cs typeface="Calibri" pitchFamily="34" charset="-120"/>
               </a:rPr>
-              <a:t>Also: mtf_render → static 3-panel PNG</a:t>
-            </a:r>
-            <a:endParaRPr lang="en-US" sz="780" dirty="0"/>
-          </a:p>
-        </p:txBody>
-      </p:sp>
-      <p:sp>
-        <p:nvSpPr>
-          <p:cNvPr id="23" name="Text 21"/>
-          <p:cNvSpPr/>
-          <p:nvPr/>
-        </p:nvSpPr>
-        <p:spPr>
-          <a:xfrm>
-            <a:off x="4526280" y="4434840"/>
-            <a:ext cx="3108960" cy="274320"/>
-          </a:xfrm>
-          <a:prstGeom prst="rect">
-            <a:avLst/>
-          </a:prstGeom>
-          <a:noFill/>
-          <a:ln/>
-        </p:spPr>
-        <p:txBody>
-          <a:bodyPr wrap="square" lIns="0" tIns="0" rIns="0" bIns="0" rtlCol="0" anchor="t"/>
-          <a:lstStyle/>
-          <a:p>
-            <a:pPr indent="0" marL="0">
-              <a:buNone/>
-            </a:pPr>
-            <a:r>
-              <a:rPr lang="en-US" sz="780" i="1" dirty="0">
-                <a:solidFill>
-                  <a:srgbClr val="6B7390"/>
-                </a:solidFill>
-                <a:latin typeface="Calibri" pitchFamily="34" charset="0"/>
-                <a:ea typeface="Calibri" pitchFamily="34" charset="-122"/>
-                <a:cs typeface="Calibri" pitchFamily="34" charset="-120"/>
-              </a:rPr>
-              <a:t>same SQLite, ops/internal tool, unchanged</a:t>
+              <a:t>Same SQLite, ops/internal tool, unchanged</a:t>
             </a:r>
             <a:endParaRPr lang="en-US" sz="780" dirty="0"/>
           </a:p>
@@ -4897,7 +4897,7 @@
                 <a:ea typeface="Calibri" pitchFamily="34" charset="-122"/>
                 <a:cs typeface="Calibri" pitchFamily="34" charset="-120"/>
               </a:rPr>
-              <a:t>Feeds that Gateway's OWN downstream consumers — out of scope here, and unrelated to charts</a:t>
+              <a:t>Purpose: gives other backend consumers (alerts, analytics, etc.) a durable, validated copy of market_data — a different job than rendering a chart</a:t>
             </a:r>
             <a:endParaRPr lang="en-US" sz="1000" dirty="0"/>
           </a:p>
@@ -5764,7 +5764,7 @@
                 <a:ea typeface="Calibri" pitchFamily="34" charset="-122"/>
                 <a:cs typeface="Calibri" pitchFamily="34" charset="-120"/>
               </a:rPr>
-              <a:t>Validated rows are enqueued internally (Railway Redis, Bull). A queue consumer drains them to whatever THIS gateway's own product needs downstream — out of scope for the chart work, and not something this pipeline controls or depends on.</a:t>
+              <a:t>Validated rows are enqueued internally (Railway Redis, Bull). Purpose: give some other backend system — e.g. an alerts engine or analytics store — a durable, validated copy of market_data via idempotent HTTP upserts. That consumer is out of scope for the chart work, and this pipeline does not depend on it.</a:t>
             </a:r>
             <a:endParaRPr lang="en-US" sz="950" dirty="0"/>
           </a:p>
